--- a/LLM_and_Enterprise_RAG_Bootcamp/Slides/Week_11_fine_tuning.pptx
+++ b/LLM_and_Enterprise_RAG_Bootcamp/Slides/Week_11_fine_tuning.pptx
@@ -3305,7 +3305,7 @@
         </p:nvSpPr>
         <p:spPr>
           <a:xfrm>
-            <a:off x="548640" y="6035040"/>
+            <a:off x="548640" y="5760720"/>
             <a:ext cx="7315200" cy="365760"/>
           </a:xfrm>
           <a:prstGeom prst="rect">
@@ -3327,7 +3327,7 @@
                 </a:solidFill>
                 <a:latin typeface="Calibri"/>
               </a:rPr>
-              <a:t>Saturday, August 15, 2026</a:t>
+              <a:t>Saturday, December 12, 2026</a:t>
             </a:r>
           </a:p>
         </p:txBody>
@@ -3340,7 +3340,7 @@
         </p:nvSpPr>
         <p:spPr>
           <a:xfrm>
-            <a:off x="548640" y="6400800"/>
+            <a:off x="548640" y="6126480"/>
             <a:ext cx="9144000" cy="365760"/>
           </a:xfrm>
           <a:prstGeom prst="rect">
@@ -3363,6 +3363,41 @@
                 <a:latin typeface="Calibri"/>
               </a:rPr>
               <a:t>LLM and Enterprise RAG Bootcamp | Instructor: Pavan R</a:t>
+            </a:r>
+          </a:p>
+        </p:txBody>
+      </p:sp>
+      <p:sp>
+        <p:nvSpPr>
+          <p:cNvPr id="9" name="TextBox 8"/>
+          <p:cNvSpPr txBox="1"/>
+          <p:nvPr/>
+        </p:nvSpPr>
+        <p:spPr>
+          <a:xfrm>
+            <a:off x="457200" y="6620256"/>
+            <a:ext cx="11247120" cy="201168"/>
+          </a:xfrm>
+          <a:prstGeom prst="rect">
+            <a:avLst/>
+          </a:prstGeom>
+          <a:noFill/>
+        </p:spPr>
+        <p:txBody>
+          <a:bodyPr wrap="square">
+            <a:spAutoFit/>
+          </a:bodyPr>
+          <a:lstStyle/>
+          <a:p>
+            <a:pPr algn="ctr"/>
+            <a:r>
+              <a:rPr sz="800" b="0">
+                <a:solidFill>
+                  <a:srgbClr val="FFFFFF"/>
+                </a:solidFill>
+                <a:latin typeface="Calibri"/>
+              </a:rPr>
+              <a:t>© 2026 Proxiant Academy | info@proxiant.com | proxiant.ai/training</a:t>
             </a:r>
           </a:p>
         </p:txBody>
@@ -3580,6 +3615,41 @@
           </a:p>
         </p:txBody>
       </p:sp>
+      <p:sp>
+        <p:nvSpPr>
+          <p:cNvPr id="7" name="TextBox 6"/>
+          <p:cNvSpPr txBox="1"/>
+          <p:nvPr/>
+        </p:nvSpPr>
+        <p:spPr>
+          <a:xfrm>
+            <a:off x="457200" y="6620256"/>
+            <a:ext cx="11247120" cy="201168"/>
+          </a:xfrm>
+          <a:prstGeom prst="rect">
+            <a:avLst/>
+          </a:prstGeom>
+          <a:noFill/>
+        </p:spPr>
+        <p:txBody>
+          <a:bodyPr wrap="square">
+            <a:spAutoFit/>
+          </a:bodyPr>
+          <a:lstStyle/>
+          <a:p>
+            <a:pPr algn="ctr"/>
+            <a:r>
+              <a:rPr sz="800" b="0">
+                <a:solidFill>
+                  <a:srgbClr val="FFFFFF"/>
+                </a:solidFill>
+                <a:latin typeface="Calibri"/>
+              </a:rPr>
+              <a:t>© 2026 Proxiant Academy | info@proxiant.com | proxiant.ai/training</a:t>
+            </a:r>
+          </a:p>
+        </p:txBody>
+      </p:sp>
     </p:spTree>
   </p:cSld>
   <p:clrMapOvr>
@@ -3793,6 +3863,41 @@
           </a:p>
         </p:txBody>
       </p:sp>
+      <p:sp>
+        <p:nvSpPr>
+          <p:cNvPr id="7" name="TextBox 6"/>
+          <p:cNvSpPr txBox="1"/>
+          <p:nvPr/>
+        </p:nvSpPr>
+        <p:spPr>
+          <a:xfrm>
+            <a:off x="457200" y="6620256"/>
+            <a:ext cx="11247120" cy="201168"/>
+          </a:xfrm>
+          <a:prstGeom prst="rect">
+            <a:avLst/>
+          </a:prstGeom>
+          <a:noFill/>
+        </p:spPr>
+        <p:txBody>
+          <a:bodyPr wrap="square">
+            <a:spAutoFit/>
+          </a:bodyPr>
+          <a:lstStyle/>
+          <a:p>
+            <a:pPr algn="ctr"/>
+            <a:r>
+              <a:rPr sz="800" b="0">
+                <a:solidFill>
+                  <a:srgbClr val="FFFFFF"/>
+                </a:solidFill>
+                <a:latin typeface="Calibri"/>
+              </a:rPr>
+              <a:t>© 2026 Proxiant Academy | info@proxiant.com | proxiant.ai/training</a:t>
+            </a:r>
+          </a:p>
+        </p:txBody>
+      </p:sp>
     </p:spTree>
   </p:cSld>
   <p:clrMapOvr>
@@ -4006,6 +4111,41 @@
           </a:p>
         </p:txBody>
       </p:sp>
+      <p:sp>
+        <p:nvSpPr>
+          <p:cNvPr id="7" name="TextBox 6"/>
+          <p:cNvSpPr txBox="1"/>
+          <p:nvPr/>
+        </p:nvSpPr>
+        <p:spPr>
+          <a:xfrm>
+            <a:off x="457200" y="6620256"/>
+            <a:ext cx="11247120" cy="201168"/>
+          </a:xfrm>
+          <a:prstGeom prst="rect">
+            <a:avLst/>
+          </a:prstGeom>
+          <a:noFill/>
+        </p:spPr>
+        <p:txBody>
+          <a:bodyPr wrap="square">
+            <a:spAutoFit/>
+          </a:bodyPr>
+          <a:lstStyle/>
+          <a:p>
+            <a:pPr algn="ctr"/>
+            <a:r>
+              <a:rPr sz="800" b="0">
+                <a:solidFill>
+                  <a:srgbClr val="FFFFFF"/>
+                </a:solidFill>
+                <a:latin typeface="Calibri"/>
+              </a:rPr>
+              <a:t>© 2026 Proxiant Academy | info@proxiant.com | proxiant.ai/training</a:t>
+            </a:r>
+          </a:p>
+        </p:txBody>
+      </p:sp>
     </p:spTree>
   </p:cSld>
   <p:clrMapOvr>
@@ -4180,6 +4320,41 @@
           </a:p>
         </p:txBody>
       </p:sp>
+      <p:sp>
+        <p:nvSpPr>
+          <p:cNvPr id="6" name="TextBox 5"/>
+          <p:cNvSpPr txBox="1"/>
+          <p:nvPr/>
+        </p:nvSpPr>
+        <p:spPr>
+          <a:xfrm>
+            <a:off x="457200" y="6620256"/>
+            <a:ext cx="11247120" cy="201168"/>
+          </a:xfrm>
+          <a:prstGeom prst="rect">
+            <a:avLst/>
+          </a:prstGeom>
+          <a:noFill/>
+        </p:spPr>
+        <p:txBody>
+          <a:bodyPr wrap="square">
+            <a:spAutoFit/>
+          </a:bodyPr>
+          <a:lstStyle/>
+          <a:p>
+            <a:pPr algn="ctr"/>
+            <a:r>
+              <a:rPr sz="800" b="0">
+                <a:solidFill>
+                  <a:srgbClr val="1E2761"/>
+                </a:solidFill>
+                <a:latin typeface="Calibri"/>
+              </a:rPr>
+              <a:t>© 2026 Proxiant Academy | info@proxiant.com | proxiant.ai/training</a:t>
+            </a:r>
+          </a:p>
+        </p:txBody>
+      </p:sp>
     </p:spTree>
   </p:cSld>
   <p:clrMapOvr>
@@ -4393,6 +4568,41 @@
           </a:p>
         </p:txBody>
       </p:sp>
+      <p:sp>
+        <p:nvSpPr>
+          <p:cNvPr id="7" name="TextBox 6"/>
+          <p:cNvSpPr txBox="1"/>
+          <p:nvPr/>
+        </p:nvSpPr>
+        <p:spPr>
+          <a:xfrm>
+            <a:off x="457200" y="6620256"/>
+            <a:ext cx="11247120" cy="201168"/>
+          </a:xfrm>
+          <a:prstGeom prst="rect">
+            <a:avLst/>
+          </a:prstGeom>
+          <a:noFill/>
+        </p:spPr>
+        <p:txBody>
+          <a:bodyPr wrap="square">
+            <a:spAutoFit/>
+          </a:bodyPr>
+          <a:lstStyle/>
+          <a:p>
+            <a:pPr algn="ctr"/>
+            <a:r>
+              <a:rPr sz="800" b="0">
+                <a:solidFill>
+                  <a:srgbClr val="FFFFFF"/>
+                </a:solidFill>
+                <a:latin typeface="Calibri"/>
+              </a:rPr>
+              <a:t>© 2026 Proxiant Academy | info@proxiant.com | proxiant.ai/training</a:t>
+            </a:r>
+          </a:p>
+        </p:txBody>
+      </p:sp>
     </p:spTree>
   </p:cSld>
   <p:clrMapOvr>
@@ -4767,6 +4977,41 @@
           </a:p>
         </p:txBody>
       </p:sp>
+      <p:sp>
+        <p:nvSpPr>
+          <p:cNvPr id="7" name="TextBox 6"/>
+          <p:cNvSpPr txBox="1"/>
+          <p:nvPr/>
+        </p:nvSpPr>
+        <p:spPr>
+          <a:xfrm>
+            <a:off x="457200" y="6620256"/>
+            <a:ext cx="11247120" cy="201168"/>
+          </a:xfrm>
+          <a:prstGeom prst="rect">
+            <a:avLst/>
+          </a:prstGeom>
+          <a:noFill/>
+        </p:spPr>
+        <p:txBody>
+          <a:bodyPr wrap="square">
+            <a:spAutoFit/>
+          </a:bodyPr>
+          <a:lstStyle/>
+          <a:p>
+            <a:pPr algn="ctr"/>
+            <a:r>
+              <a:rPr sz="800" b="0">
+                <a:solidFill>
+                  <a:srgbClr val="FFFFFF"/>
+                </a:solidFill>
+                <a:latin typeface="Calibri"/>
+              </a:rPr>
+              <a:t>© 2026 Proxiant Academy | info@proxiant.com | proxiant.ai/training</a:t>
+            </a:r>
+          </a:p>
+        </p:txBody>
+      </p:sp>
     </p:spTree>
   </p:cSld>
   <p:clrMapOvr>
@@ -4980,6 +5225,41 @@
           </a:p>
         </p:txBody>
       </p:sp>
+      <p:sp>
+        <p:nvSpPr>
+          <p:cNvPr id="7" name="TextBox 6"/>
+          <p:cNvSpPr txBox="1"/>
+          <p:nvPr/>
+        </p:nvSpPr>
+        <p:spPr>
+          <a:xfrm>
+            <a:off x="457200" y="6620256"/>
+            <a:ext cx="11247120" cy="201168"/>
+          </a:xfrm>
+          <a:prstGeom prst="rect">
+            <a:avLst/>
+          </a:prstGeom>
+          <a:noFill/>
+        </p:spPr>
+        <p:txBody>
+          <a:bodyPr wrap="square">
+            <a:spAutoFit/>
+          </a:bodyPr>
+          <a:lstStyle/>
+          <a:p>
+            <a:pPr algn="ctr"/>
+            <a:r>
+              <a:rPr sz="800" b="0">
+                <a:solidFill>
+                  <a:srgbClr val="FFFFFF"/>
+                </a:solidFill>
+                <a:latin typeface="Calibri"/>
+              </a:rPr>
+              <a:t>© 2026 Proxiant Academy | info@proxiant.com | proxiant.ai/training</a:t>
+            </a:r>
+          </a:p>
+        </p:txBody>
+      </p:sp>
     </p:spTree>
   </p:cSld>
   <p:clrMapOvr>
@@ -5193,6 +5473,41 @@
           </a:p>
         </p:txBody>
       </p:sp>
+      <p:sp>
+        <p:nvSpPr>
+          <p:cNvPr id="7" name="TextBox 6"/>
+          <p:cNvSpPr txBox="1"/>
+          <p:nvPr/>
+        </p:nvSpPr>
+        <p:spPr>
+          <a:xfrm>
+            <a:off x="457200" y="6620256"/>
+            <a:ext cx="11247120" cy="201168"/>
+          </a:xfrm>
+          <a:prstGeom prst="rect">
+            <a:avLst/>
+          </a:prstGeom>
+          <a:noFill/>
+        </p:spPr>
+        <p:txBody>
+          <a:bodyPr wrap="square">
+            <a:spAutoFit/>
+          </a:bodyPr>
+          <a:lstStyle/>
+          <a:p>
+            <a:pPr algn="ctr"/>
+            <a:r>
+              <a:rPr sz="800" b="0">
+                <a:solidFill>
+                  <a:srgbClr val="FFFFFF"/>
+                </a:solidFill>
+                <a:latin typeface="Calibri"/>
+              </a:rPr>
+              <a:t>© 2026 Proxiant Academy | info@proxiant.com | proxiant.ai/training</a:t>
+            </a:r>
+          </a:p>
+        </p:txBody>
+      </p:sp>
     </p:spTree>
   </p:cSld>
   <p:clrMapOvr>
@@ -5406,6 +5721,41 @@
           </a:p>
         </p:txBody>
       </p:sp>
+      <p:sp>
+        <p:nvSpPr>
+          <p:cNvPr id="7" name="TextBox 6"/>
+          <p:cNvSpPr txBox="1"/>
+          <p:nvPr/>
+        </p:nvSpPr>
+        <p:spPr>
+          <a:xfrm>
+            <a:off x="457200" y="6620256"/>
+            <a:ext cx="11247120" cy="201168"/>
+          </a:xfrm>
+          <a:prstGeom prst="rect">
+            <a:avLst/>
+          </a:prstGeom>
+          <a:noFill/>
+        </p:spPr>
+        <p:txBody>
+          <a:bodyPr wrap="square">
+            <a:spAutoFit/>
+          </a:bodyPr>
+          <a:lstStyle/>
+          <a:p>
+            <a:pPr algn="ctr"/>
+            <a:r>
+              <a:rPr sz="800" b="0">
+                <a:solidFill>
+                  <a:srgbClr val="FFFFFF"/>
+                </a:solidFill>
+                <a:latin typeface="Calibri"/>
+              </a:rPr>
+              <a:t>© 2026 Proxiant Academy | info@proxiant.com | proxiant.ai/training</a:t>
+            </a:r>
+          </a:p>
+        </p:txBody>
+      </p:sp>
     </p:spTree>
   </p:cSld>
   <p:clrMapOvr>
@@ -5619,6 +5969,41 @@
           </a:p>
         </p:txBody>
       </p:sp>
+      <p:sp>
+        <p:nvSpPr>
+          <p:cNvPr id="7" name="TextBox 6"/>
+          <p:cNvSpPr txBox="1"/>
+          <p:nvPr/>
+        </p:nvSpPr>
+        <p:spPr>
+          <a:xfrm>
+            <a:off x="457200" y="6620256"/>
+            <a:ext cx="11247120" cy="201168"/>
+          </a:xfrm>
+          <a:prstGeom prst="rect">
+            <a:avLst/>
+          </a:prstGeom>
+          <a:noFill/>
+        </p:spPr>
+        <p:txBody>
+          <a:bodyPr wrap="square">
+            <a:spAutoFit/>
+          </a:bodyPr>
+          <a:lstStyle/>
+          <a:p>
+            <a:pPr algn="ctr"/>
+            <a:r>
+              <a:rPr sz="800" b="0">
+                <a:solidFill>
+                  <a:srgbClr val="FFFFFF"/>
+                </a:solidFill>
+                <a:latin typeface="Calibri"/>
+              </a:rPr>
+              <a:t>© 2026 Proxiant Academy | info@proxiant.com | proxiant.ai/training</a:t>
+            </a:r>
+          </a:p>
+        </p:txBody>
+      </p:sp>
     </p:spTree>
   </p:cSld>
   <p:clrMapOvr>
@@ -5793,6 +6178,41 @@
           </a:p>
         </p:txBody>
       </p:sp>
+      <p:sp>
+        <p:nvSpPr>
+          <p:cNvPr id="6" name="TextBox 5"/>
+          <p:cNvSpPr txBox="1"/>
+          <p:nvPr/>
+        </p:nvSpPr>
+        <p:spPr>
+          <a:xfrm>
+            <a:off x="457200" y="6620256"/>
+            <a:ext cx="11247120" cy="201168"/>
+          </a:xfrm>
+          <a:prstGeom prst="rect">
+            <a:avLst/>
+          </a:prstGeom>
+          <a:noFill/>
+        </p:spPr>
+        <p:txBody>
+          <a:bodyPr wrap="square">
+            <a:spAutoFit/>
+          </a:bodyPr>
+          <a:lstStyle/>
+          <a:p>
+            <a:pPr algn="ctr"/>
+            <a:r>
+              <a:rPr sz="800" b="0">
+                <a:solidFill>
+                  <a:srgbClr val="1E2761"/>
+                </a:solidFill>
+                <a:latin typeface="Calibri"/>
+              </a:rPr>
+              <a:t>© 2026 Proxiant Academy | info@proxiant.com | proxiant.ai/training</a:t>
+            </a:r>
+          </a:p>
+        </p:txBody>
+      </p:sp>
     </p:spTree>
   </p:cSld>
   <p:clrMapOvr>
@@ -6006,6 +6426,41 @@
           </a:p>
         </p:txBody>
       </p:sp>
+      <p:sp>
+        <p:nvSpPr>
+          <p:cNvPr id="7" name="TextBox 6"/>
+          <p:cNvSpPr txBox="1"/>
+          <p:nvPr/>
+        </p:nvSpPr>
+        <p:spPr>
+          <a:xfrm>
+            <a:off x="457200" y="6620256"/>
+            <a:ext cx="11247120" cy="201168"/>
+          </a:xfrm>
+          <a:prstGeom prst="rect">
+            <a:avLst/>
+          </a:prstGeom>
+          <a:noFill/>
+        </p:spPr>
+        <p:txBody>
+          <a:bodyPr wrap="square">
+            <a:spAutoFit/>
+          </a:bodyPr>
+          <a:lstStyle/>
+          <a:p>
+            <a:pPr algn="ctr"/>
+            <a:r>
+              <a:rPr sz="800" b="0">
+                <a:solidFill>
+                  <a:srgbClr val="FFFFFF"/>
+                </a:solidFill>
+                <a:latin typeface="Calibri"/>
+              </a:rPr>
+              <a:t>© 2026 Proxiant Academy | info@proxiant.com | proxiant.ai/training</a:t>
+            </a:r>
+          </a:p>
+        </p:txBody>
+      </p:sp>
     </p:spTree>
   </p:cSld>
   <p:clrMapOvr>
@@ -6180,6 +6635,41 @@
           </a:p>
         </p:txBody>
       </p:sp>
+      <p:sp>
+        <p:nvSpPr>
+          <p:cNvPr id="6" name="TextBox 5"/>
+          <p:cNvSpPr txBox="1"/>
+          <p:nvPr/>
+        </p:nvSpPr>
+        <p:spPr>
+          <a:xfrm>
+            <a:off x="457200" y="6620256"/>
+            <a:ext cx="11247120" cy="201168"/>
+          </a:xfrm>
+          <a:prstGeom prst="rect">
+            <a:avLst/>
+          </a:prstGeom>
+          <a:noFill/>
+        </p:spPr>
+        <p:txBody>
+          <a:bodyPr wrap="square">
+            <a:spAutoFit/>
+          </a:bodyPr>
+          <a:lstStyle/>
+          <a:p>
+            <a:pPr algn="ctr"/>
+            <a:r>
+              <a:rPr sz="800" b="0">
+                <a:solidFill>
+                  <a:srgbClr val="1E2761"/>
+                </a:solidFill>
+                <a:latin typeface="Calibri"/>
+              </a:rPr>
+              <a:t>© 2026 Proxiant Academy | info@proxiant.com | proxiant.ai/training</a:t>
+            </a:r>
+          </a:p>
+        </p:txBody>
+      </p:sp>
     </p:spTree>
   </p:cSld>
   <p:clrMapOvr>
@@ -6393,6 +6883,41 @@
           </a:p>
         </p:txBody>
       </p:sp>
+      <p:sp>
+        <p:nvSpPr>
+          <p:cNvPr id="7" name="TextBox 6"/>
+          <p:cNvSpPr txBox="1"/>
+          <p:nvPr/>
+        </p:nvSpPr>
+        <p:spPr>
+          <a:xfrm>
+            <a:off x="457200" y="6620256"/>
+            <a:ext cx="11247120" cy="201168"/>
+          </a:xfrm>
+          <a:prstGeom prst="rect">
+            <a:avLst/>
+          </a:prstGeom>
+          <a:noFill/>
+        </p:spPr>
+        <p:txBody>
+          <a:bodyPr wrap="square">
+            <a:spAutoFit/>
+          </a:bodyPr>
+          <a:lstStyle/>
+          <a:p>
+            <a:pPr algn="ctr"/>
+            <a:r>
+              <a:rPr sz="800" b="0">
+                <a:solidFill>
+                  <a:srgbClr val="FFFFFF"/>
+                </a:solidFill>
+                <a:latin typeface="Calibri"/>
+              </a:rPr>
+              <a:t>© 2026 Proxiant Academy | info@proxiant.com | proxiant.ai/training</a:t>
+            </a:r>
+          </a:p>
+        </p:txBody>
+      </p:sp>
     </p:spTree>
   </p:cSld>
   <p:clrMapOvr>
@@ -6606,6 +7131,41 @@
           </a:p>
         </p:txBody>
       </p:sp>
+      <p:sp>
+        <p:nvSpPr>
+          <p:cNvPr id="7" name="TextBox 6"/>
+          <p:cNvSpPr txBox="1"/>
+          <p:nvPr/>
+        </p:nvSpPr>
+        <p:spPr>
+          <a:xfrm>
+            <a:off x="457200" y="6620256"/>
+            <a:ext cx="11247120" cy="201168"/>
+          </a:xfrm>
+          <a:prstGeom prst="rect">
+            <a:avLst/>
+          </a:prstGeom>
+          <a:noFill/>
+        </p:spPr>
+        <p:txBody>
+          <a:bodyPr wrap="square">
+            <a:spAutoFit/>
+          </a:bodyPr>
+          <a:lstStyle/>
+          <a:p>
+            <a:pPr algn="ctr"/>
+            <a:r>
+              <a:rPr sz="800" b="0">
+                <a:solidFill>
+                  <a:srgbClr val="FFFFFF"/>
+                </a:solidFill>
+                <a:latin typeface="Calibri"/>
+              </a:rPr>
+              <a:t>© 2026 Proxiant Academy | info@proxiant.com | proxiant.ai/training</a:t>
+            </a:r>
+          </a:p>
+        </p:txBody>
+      </p:sp>
     </p:spTree>
   </p:cSld>
   <p:clrMapOvr>
@@ -6819,6 +7379,41 @@
           </a:p>
         </p:txBody>
       </p:sp>
+      <p:sp>
+        <p:nvSpPr>
+          <p:cNvPr id="7" name="TextBox 6"/>
+          <p:cNvSpPr txBox="1"/>
+          <p:nvPr/>
+        </p:nvSpPr>
+        <p:spPr>
+          <a:xfrm>
+            <a:off x="457200" y="6620256"/>
+            <a:ext cx="11247120" cy="201168"/>
+          </a:xfrm>
+          <a:prstGeom prst="rect">
+            <a:avLst/>
+          </a:prstGeom>
+          <a:noFill/>
+        </p:spPr>
+        <p:txBody>
+          <a:bodyPr wrap="square">
+            <a:spAutoFit/>
+          </a:bodyPr>
+          <a:lstStyle/>
+          <a:p>
+            <a:pPr algn="ctr"/>
+            <a:r>
+              <a:rPr sz="800" b="0">
+                <a:solidFill>
+                  <a:srgbClr val="FFFFFF"/>
+                </a:solidFill>
+                <a:latin typeface="Calibri"/>
+              </a:rPr>
+              <a:t>© 2026 Proxiant Academy | info@proxiant.com | proxiant.ai/training</a:t>
+            </a:r>
+          </a:p>
+        </p:txBody>
+      </p:sp>
     </p:spTree>
   </p:cSld>
   <p:clrMapOvr>
@@ -6993,6 +7588,41 @@
           </a:p>
         </p:txBody>
       </p:sp>
+      <p:sp>
+        <p:nvSpPr>
+          <p:cNvPr id="6" name="TextBox 5"/>
+          <p:cNvSpPr txBox="1"/>
+          <p:nvPr/>
+        </p:nvSpPr>
+        <p:spPr>
+          <a:xfrm>
+            <a:off x="457200" y="6620256"/>
+            <a:ext cx="11247120" cy="201168"/>
+          </a:xfrm>
+          <a:prstGeom prst="rect">
+            <a:avLst/>
+          </a:prstGeom>
+          <a:noFill/>
+        </p:spPr>
+        <p:txBody>
+          <a:bodyPr wrap="square">
+            <a:spAutoFit/>
+          </a:bodyPr>
+          <a:lstStyle/>
+          <a:p>
+            <a:pPr algn="ctr"/>
+            <a:r>
+              <a:rPr sz="800" b="0">
+                <a:solidFill>
+                  <a:srgbClr val="1E2761"/>
+                </a:solidFill>
+                <a:latin typeface="Calibri"/>
+              </a:rPr>
+              <a:t>© 2026 Proxiant Academy | info@proxiant.com | proxiant.ai/training</a:t>
+            </a:r>
+          </a:p>
+        </p:txBody>
+      </p:sp>
     </p:spTree>
   </p:cSld>
   <p:clrMapOvr>
@@ -7254,6 +7884,41 @@
           </a:p>
         </p:txBody>
       </p:sp>
+      <p:sp>
+        <p:nvSpPr>
+          <p:cNvPr id="7" name="TextBox 6"/>
+          <p:cNvSpPr txBox="1"/>
+          <p:nvPr/>
+        </p:nvSpPr>
+        <p:spPr>
+          <a:xfrm>
+            <a:off x="457200" y="6620256"/>
+            <a:ext cx="11247120" cy="201168"/>
+          </a:xfrm>
+          <a:prstGeom prst="rect">
+            <a:avLst/>
+          </a:prstGeom>
+          <a:noFill/>
+        </p:spPr>
+        <p:txBody>
+          <a:bodyPr wrap="square">
+            <a:spAutoFit/>
+          </a:bodyPr>
+          <a:lstStyle/>
+          <a:p>
+            <a:pPr algn="ctr"/>
+            <a:r>
+              <a:rPr sz="800" b="0">
+                <a:solidFill>
+                  <a:srgbClr val="FFFFFF"/>
+                </a:solidFill>
+                <a:latin typeface="Calibri"/>
+              </a:rPr>
+              <a:t>© 2026 Proxiant Academy | info@proxiant.com | proxiant.ai/training</a:t>
+            </a:r>
+          </a:p>
+        </p:txBody>
+      </p:sp>
     </p:spTree>
   </p:cSld>
   <p:clrMapOvr>
@@ -7498,7 +8163,7 @@
         </p:nvSpPr>
         <p:spPr>
           <a:xfrm>
-            <a:off x="640080" y="6400800"/>
+            <a:off x="640080" y="6217920"/>
             <a:ext cx="10972800" cy="365760"/>
           </a:xfrm>
           <a:prstGeom prst="rect">
@@ -7521,6 +8186,41 @@
                 <a:latin typeface="Calibri"/>
               </a:rPr>
               <a:t>Quiz Tuesday | Project due next Saturday | Instructor: Pavan R</a:t>
+            </a:r>
+          </a:p>
+        </p:txBody>
+      </p:sp>
+      <p:sp>
+        <p:nvSpPr>
+          <p:cNvPr id="9" name="TextBox 8"/>
+          <p:cNvSpPr txBox="1"/>
+          <p:nvPr/>
+        </p:nvSpPr>
+        <p:spPr>
+          <a:xfrm>
+            <a:off x="457200" y="6620256"/>
+            <a:ext cx="11247120" cy="201168"/>
+          </a:xfrm>
+          <a:prstGeom prst="rect">
+            <a:avLst/>
+          </a:prstGeom>
+          <a:noFill/>
+        </p:spPr>
+        <p:txBody>
+          <a:bodyPr wrap="square">
+            <a:spAutoFit/>
+          </a:bodyPr>
+          <a:lstStyle/>
+          <a:p>
+            <a:pPr algn="ctr"/>
+            <a:r>
+              <a:rPr sz="800" b="0">
+                <a:solidFill>
+                  <a:srgbClr val="FFFFFF"/>
+                </a:solidFill>
+                <a:latin typeface="Calibri"/>
+              </a:rPr>
+              <a:t>© 2026 Proxiant Academy | info@proxiant.com | proxiant.ai/training</a:t>
             </a:r>
           </a:p>
         </p:txBody>
@@ -7738,6 +8438,41 @@
           </a:p>
         </p:txBody>
       </p:sp>
+      <p:sp>
+        <p:nvSpPr>
+          <p:cNvPr id="7" name="TextBox 6"/>
+          <p:cNvSpPr txBox="1"/>
+          <p:nvPr/>
+        </p:nvSpPr>
+        <p:spPr>
+          <a:xfrm>
+            <a:off x="457200" y="6620256"/>
+            <a:ext cx="11247120" cy="201168"/>
+          </a:xfrm>
+          <a:prstGeom prst="rect">
+            <a:avLst/>
+          </a:prstGeom>
+          <a:noFill/>
+        </p:spPr>
+        <p:txBody>
+          <a:bodyPr wrap="square">
+            <a:spAutoFit/>
+          </a:bodyPr>
+          <a:lstStyle/>
+          <a:p>
+            <a:pPr algn="ctr"/>
+            <a:r>
+              <a:rPr sz="800" b="0">
+                <a:solidFill>
+                  <a:srgbClr val="FFFFFF"/>
+                </a:solidFill>
+                <a:latin typeface="Calibri"/>
+              </a:rPr>
+              <a:t>© 2026 Proxiant Academy | info@proxiant.com | proxiant.ai/training</a:t>
+            </a:r>
+          </a:p>
+        </p:txBody>
+      </p:sp>
     </p:spTree>
   </p:cSld>
   <p:clrMapOvr>
@@ -8015,6 +8750,41 @@
           </a:p>
         </p:txBody>
       </p:sp>
+      <p:sp>
+        <p:nvSpPr>
+          <p:cNvPr id="7" name="TextBox 6"/>
+          <p:cNvSpPr txBox="1"/>
+          <p:nvPr/>
+        </p:nvSpPr>
+        <p:spPr>
+          <a:xfrm>
+            <a:off x="457200" y="6620256"/>
+            <a:ext cx="11247120" cy="201168"/>
+          </a:xfrm>
+          <a:prstGeom prst="rect">
+            <a:avLst/>
+          </a:prstGeom>
+          <a:noFill/>
+        </p:spPr>
+        <p:txBody>
+          <a:bodyPr wrap="square">
+            <a:spAutoFit/>
+          </a:bodyPr>
+          <a:lstStyle/>
+          <a:p>
+            <a:pPr algn="ctr"/>
+            <a:r>
+              <a:rPr sz="800" b="0">
+                <a:solidFill>
+                  <a:srgbClr val="FFFFFF"/>
+                </a:solidFill>
+                <a:latin typeface="Calibri"/>
+              </a:rPr>
+              <a:t>© 2026 Proxiant Academy | info@proxiant.com | proxiant.ai/training</a:t>
+            </a:r>
+          </a:p>
+        </p:txBody>
+      </p:sp>
     </p:spTree>
   </p:cSld>
   <p:clrMapOvr>
@@ -8189,6 +8959,41 @@
           </a:p>
         </p:txBody>
       </p:sp>
+      <p:sp>
+        <p:nvSpPr>
+          <p:cNvPr id="6" name="TextBox 5"/>
+          <p:cNvSpPr txBox="1"/>
+          <p:nvPr/>
+        </p:nvSpPr>
+        <p:spPr>
+          <a:xfrm>
+            <a:off x="457200" y="6620256"/>
+            <a:ext cx="11247120" cy="201168"/>
+          </a:xfrm>
+          <a:prstGeom prst="rect">
+            <a:avLst/>
+          </a:prstGeom>
+          <a:noFill/>
+        </p:spPr>
+        <p:txBody>
+          <a:bodyPr wrap="square">
+            <a:spAutoFit/>
+          </a:bodyPr>
+          <a:lstStyle/>
+          <a:p>
+            <a:pPr algn="ctr"/>
+            <a:r>
+              <a:rPr sz="800" b="0">
+                <a:solidFill>
+                  <a:srgbClr val="1E2761"/>
+                </a:solidFill>
+                <a:latin typeface="Calibri"/>
+              </a:rPr>
+              <a:t>© 2026 Proxiant Academy | info@proxiant.com | proxiant.ai/training</a:t>
+            </a:r>
+          </a:p>
+        </p:txBody>
+      </p:sp>
     </p:spTree>
   </p:cSld>
   <p:clrMapOvr>
@@ -8402,6 +9207,41 @@
           </a:p>
         </p:txBody>
       </p:sp>
+      <p:sp>
+        <p:nvSpPr>
+          <p:cNvPr id="7" name="TextBox 6"/>
+          <p:cNvSpPr txBox="1"/>
+          <p:nvPr/>
+        </p:nvSpPr>
+        <p:spPr>
+          <a:xfrm>
+            <a:off x="457200" y="6620256"/>
+            <a:ext cx="11247120" cy="201168"/>
+          </a:xfrm>
+          <a:prstGeom prst="rect">
+            <a:avLst/>
+          </a:prstGeom>
+          <a:noFill/>
+        </p:spPr>
+        <p:txBody>
+          <a:bodyPr wrap="square">
+            <a:spAutoFit/>
+          </a:bodyPr>
+          <a:lstStyle/>
+          <a:p>
+            <a:pPr algn="ctr"/>
+            <a:r>
+              <a:rPr sz="800" b="0">
+                <a:solidFill>
+                  <a:srgbClr val="FFFFFF"/>
+                </a:solidFill>
+                <a:latin typeface="Calibri"/>
+              </a:rPr>
+              <a:t>© 2026 Proxiant Academy | info@proxiant.com | proxiant.ai/training</a:t>
+            </a:r>
+          </a:p>
+        </p:txBody>
+      </p:sp>
     </p:spTree>
   </p:cSld>
   <p:clrMapOvr>
@@ -8615,6 +9455,41 @@
           </a:p>
         </p:txBody>
       </p:sp>
+      <p:sp>
+        <p:nvSpPr>
+          <p:cNvPr id="7" name="TextBox 6"/>
+          <p:cNvSpPr txBox="1"/>
+          <p:nvPr/>
+        </p:nvSpPr>
+        <p:spPr>
+          <a:xfrm>
+            <a:off x="457200" y="6620256"/>
+            <a:ext cx="11247120" cy="201168"/>
+          </a:xfrm>
+          <a:prstGeom prst="rect">
+            <a:avLst/>
+          </a:prstGeom>
+          <a:noFill/>
+        </p:spPr>
+        <p:txBody>
+          <a:bodyPr wrap="square">
+            <a:spAutoFit/>
+          </a:bodyPr>
+          <a:lstStyle/>
+          <a:p>
+            <a:pPr algn="ctr"/>
+            <a:r>
+              <a:rPr sz="800" b="0">
+                <a:solidFill>
+                  <a:srgbClr val="FFFFFF"/>
+                </a:solidFill>
+                <a:latin typeface="Calibri"/>
+              </a:rPr>
+              <a:t>© 2026 Proxiant Academy | info@proxiant.com | proxiant.ai/training</a:t>
+            </a:r>
+          </a:p>
+        </p:txBody>
+      </p:sp>
     </p:spTree>
   </p:cSld>
   <p:clrMapOvr>
@@ -8828,6 +9703,41 @@
           </a:p>
         </p:txBody>
       </p:sp>
+      <p:sp>
+        <p:nvSpPr>
+          <p:cNvPr id="7" name="TextBox 6"/>
+          <p:cNvSpPr txBox="1"/>
+          <p:nvPr/>
+        </p:nvSpPr>
+        <p:spPr>
+          <a:xfrm>
+            <a:off x="457200" y="6620256"/>
+            <a:ext cx="11247120" cy="201168"/>
+          </a:xfrm>
+          <a:prstGeom prst="rect">
+            <a:avLst/>
+          </a:prstGeom>
+          <a:noFill/>
+        </p:spPr>
+        <p:txBody>
+          <a:bodyPr wrap="square">
+            <a:spAutoFit/>
+          </a:bodyPr>
+          <a:lstStyle/>
+          <a:p>
+            <a:pPr algn="ctr"/>
+            <a:r>
+              <a:rPr sz="800" b="0">
+                <a:solidFill>
+                  <a:srgbClr val="FFFFFF"/>
+                </a:solidFill>
+                <a:latin typeface="Calibri"/>
+              </a:rPr>
+              <a:t>© 2026 Proxiant Academy | info@proxiant.com | proxiant.ai/training</a:t>
+            </a:r>
+          </a:p>
+        </p:txBody>
+      </p:sp>
     </p:spTree>
   </p:cSld>
   <p:clrMapOvr>
@@ -9038,6 +9948,41 @@
           <a:lstStyle/>
           <a:p>
             <a:pPr algn="ctr"/>
+          </a:p>
+        </p:txBody>
+      </p:sp>
+      <p:sp>
+        <p:nvSpPr>
+          <p:cNvPr id="7" name="TextBox 6"/>
+          <p:cNvSpPr txBox="1"/>
+          <p:nvPr/>
+        </p:nvSpPr>
+        <p:spPr>
+          <a:xfrm>
+            <a:off x="457200" y="6620256"/>
+            <a:ext cx="11247120" cy="201168"/>
+          </a:xfrm>
+          <a:prstGeom prst="rect">
+            <a:avLst/>
+          </a:prstGeom>
+          <a:noFill/>
+        </p:spPr>
+        <p:txBody>
+          <a:bodyPr wrap="square">
+            <a:spAutoFit/>
+          </a:bodyPr>
+          <a:lstStyle/>
+          <a:p>
+            <a:pPr algn="ctr"/>
+            <a:r>
+              <a:rPr sz="800" b="0">
+                <a:solidFill>
+                  <a:srgbClr val="FFFFFF"/>
+                </a:solidFill>
+                <a:latin typeface="Calibri"/>
+              </a:rPr>
+              <a:t>© 2026 Proxiant Academy | info@proxiant.com | proxiant.ai/training</a:t>
+            </a:r>
           </a:p>
         </p:txBody>
       </p:sp>
